--- a/01_FoundationProjects/MFL15_Smart_Fan/MFL15_Smart_Fan.pptx
+++ b/01_FoundationProjects/MFL15_Smart_Fan/MFL15_Smart_Fan.pptx
@@ -265,7 +265,7 @@
           <a:p>
             <a:fld id="{375049E3-AEF5-412D-9F98-5201579F9569}" type="datetimeFigureOut">
               <a:rPr lang="en-GB" smtClean="0"/>
-              <a:t>11/01/2026</a:t>
+              <a:t>18/01/2026</a:t>
             </a:fld>
             <a:endParaRPr lang="en-GB"/>
           </a:p>
@@ -465,7 +465,7 @@
           <a:p>
             <a:fld id="{375049E3-AEF5-412D-9F98-5201579F9569}" type="datetimeFigureOut">
               <a:rPr lang="en-GB" smtClean="0"/>
-              <a:t>11/01/2026</a:t>
+              <a:t>18/01/2026</a:t>
             </a:fld>
             <a:endParaRPr lang="en-GB"/>
           </a:p>
@@ -675,7 +675,7 @@
           <a:p>
             <a:fld id="{375049E3-AEF5-412D-9F98-5201579F9569}" type="datetimeFigureOut">
               <a:rPr lang="en-GB" smtClean="0"/>
-              <a:t>11/01/2026</a:t>
+              <a:t>18/01/2026</a:t>
             </a:fld>
             <a:endParaRPr lang="en-GB"/>
           </a:p>
@@ -875,7 +875,7 @@
           <a:p>
             <a:fld id="{375049E3-AEF5-412D-9F98-5201579F9569}" type="datetimeFigureOut">
               <a:rPr lang="en-GB" smtClean="0"/>
-              <a:t>11/01/2026</a:t>
+              <a:t>18/01/2026</a:t>
             </a:fld>
             <a:endParaRPr lang="en-GB"/>
           </a:p>
@@ -1151,7 +1151,7 @@
           <a:p>
             <a:fld id="{375049E3-AEF5-412D-9F98-5201579F9569}" type="datetimeFigureOut">
               <a:rPr lang="en-GB" smtClean="0"/>
-              <a:t>11/01/2026</a:t>
+              <a:t>18/01/2026</a:t>
             </a:fld>
             <a:endParaRPr lang="en-GB"/>
           </a:p>
@@ -1419,7 +1419,7 @@
           <a:p>
             <a:fld id="{375049E3-AEF5-412D-9F98-5201579F9569}" type="datetimeFigureOut">
               <a:rPr lang="en-GB" smtClean="0"/>
-              <a:t>11/01/2026</a:t>
+              <a:t>18/01/2026</a:t>
             </a:fld>
             <a:endParaRPr lang="en-GB"/>
           </a:p>
@@ -1834,7 +1834,7 @@
           <a:p>
             <a:fld id="{375049E3-AEF5-412D-9F98-5201579F9569}" type="datetimeFigureOut">
               <a:rPr lang="en-GB" smtClean="0"/>
-              <a:t>11/01/2026</a:t>
+              <a:t>18/01/2026</a:t>
             </a:fld>
             <a:endParaRPr lang="en-GB"/>
           </a:p>
@@ -1976,7 +1976,7 @@
           <a:p>
             <a:fld id="{375049E3-AEF5-412D-9F98-5201579F9569}" type="datetimeFigureOut">
               <a:rPr lang="en-GB" smtClean="0"/>
-              <a:t>11/01/2026</a:t>
+              <a:t>18/01/2026</a:t>
             </a:fld>
             <a:endParaRPr lang="en-GB"/>
           </a:p>
@@ -2089,7 +2089,7 @@
           <a:p>
             <a:fld id="{375049E3-AEF5-412D-9F98-5201579F9569}" type="datetimeFigureOut">
               <a:rPr lang="en-GB" smtClean="0"/>
-              <a:t>11/01/2026</a:t>
+              <a:t>18/01/2026</a:t>
             </a:fld>
             <a:endParaRPr lang="en-GB"/>
           </a:p>
@@ -2402,7 +2402,7 @@
           <a:p>
             <a:fld id="{375049E3-AEF5-412D-9F98-5201579F9569}" type="datetimeFigureOut">
               <a:rPr lang="en-GB" smtClean="0"/>
-              <a:t>11/01/2026</a:t>
+              <a:t>18/01/2026</a:t>
             </a:fld>
             <a:endParaRPr lang="en-GB"/>
           </a:p>
@@ -2691,7 +2691,7 @@
           <a:p>
             <a:fld id="{375049E3-AEF5-412D-9F98-5201579F9569}" type="datetimeFigureOut">
               <a:rPr lang="en-GB" smtClean="0"/>
-              <a:t>11/01/2026</a:t>
+              <a:t>18/01/2026</a:t>
             </a:fld>
             <a:endParaRPr lang="en-GB"/>
           </a:p>
@@ -2934,7 +2934,7 @@
           <a:p>
             <a:fld id="{375049E3-AEF5-412D-9F98-5201579F9569}" type="datetimeFigureOut">
               <a:rPr lang="en-GB" smtClean="0"/>
-              <a:t>11/01/2026</a:t>
+              <a:t>18/01/2026</a:t>
             </a:fld>
             <a:endParaRPr lang="en-GB"/>
           </a:p>
@@ -4833,7 +4833,7 @@
           <a:p>
             <a:r>
               <a:rPr lang="en-GB" sz="1800" b="1" dirty="0"/>
-              <a:t>Execute the code (MFL15.ino) in the motion creative board</a:t>
+              <a:t>Execute the code in the motion creative board</a:t>
             </a:r>
           </a:p>
         </p:txBody>
@@ -5178,7 +5178,15 @@
             </a:r>
             <a:r>
               <a:rPr lang="sv-SE" b="1" dirty="0"/>
-              <a:t>(MFL15.ino):</a:t>
+              <a:t>(</a:t>
+            </a:r>
+            <a:r>
+              <a:rPr lang="en-GB" b="1" dirty="0"/>
+              <a:t>MFL15_Smart_Fan</a:t>
+            </a:r>
+            <a:r>
+              <a:rPr lang="sv-SE" b="1" dirty="0"/>
+              <a:t>.ino):</a:t>
             </a:r>
           </a:p>
           <a:p>
@@ -5186,7 +5194,7 @@
               <a:rPr lang="en-GB" b="1" dirty="0">
                 <a:hlinkClick r:id="rId4"/>
               </a:rPr>
-              <a:t>https://github.com/info-zas/zas-robotics-motion/blob/main/01_FoundationProjects/MFL15/MFL15/MFL15.ino</a:t>
+              <a:t>https://github.com/info-zas/zas-robotics-motion/tree/main/01_FoundationProjects/MFL15_Smart_Fan/MFL15_Smart_Fan</a:t>
             </a:r>
             <a:endParaRPr lang="en-GB" b="1" dirty="0"/>
           </a:p>
@@ -5686,7 +5694,7 @@
                 <a:ea typeface="Calibri Light" panose="020F0302020204030204" pitchFamily="34" charset="0"/>
                 <a:cs typeface="Calibri Light" panose="020F0302020204030204" pitchFamily="34" charset="0"/>
               </a:rPr>
-              <a:t>MFL15_a : </a:t>
+              <a:t>MFL15 : </a:t>
             </a:r>
             <a:r>
               <a:rPr lang="en-US" b="1" dirty="0">
@@ -6083,8 +6091,8 @@
         </p:nvSpPr>
         <p:spPr>
           <a:xfrm>
-            <a:off x="838200" y="5124230"/>
-            <a:ext cx="4309253" cy="1477328"/>
+            <a:off x="702908" y="3802034"/>
+            <a:ext cx="4803157" cy="1754326"/>
           </a:xfrm>
           <a:prstGeom prst="rect">
             <a:avLst/>
@@ -6108,7 +6116,15 @@
             </a:r>
             <a:r>
               <a:rPr lang="sv-SE" b="1" dirty="0"/>
-              <a:t>(MFL15_a.ino):</a:t>
+              <a:t>(</a:t>
+            </a:r>
+            <a:r>
+              <a:rPr lang="en-GB" b="1" dirty="0"/>
+              <a:t>MFL15_Smart_Fan_NeoPixel</a:t>
+            </a:r>
+            <a:r>
+              <a:rPr lang="sv-SE" b="1" dirty="0"/>
+              <a:t>.ino):</a:t>
             </a:r>
           </a:p>
           <a:p>
@@ -6116,7 +6132,7 @@
               <a:rPr lang="en-GB" b="1" dirty="0">
                 <a:hlinkClick r:id="rId3"/>
               </a:rPr>
-              <a:t>https://github.com/info-zas/zas-robotics-motion/blob/main/01_FoundationProjects/MFL15/MFL15_a/MFL15_a.ino</a:t>
+              <a:t>https://github.com/info-zas/zas-robotics-motion/tree/main/01_FoundationProjects/MFL15_Smart_Fan/MFL15_Smart_Fan_NeoPixel</a:t>
             </a:r>
             <a:endParaRPr lang="en-GB" b="1" dirty="0"/>
           </a:p>
